--- a/Presentation/FitTech_Capstone_Presentation.pptx
+++ b/Presentation/FitTech_Capstone_Presentation.pptx
@@ -17,6 +17,8 @@
     <p:sldId id="265" r:id="rId11"/>
     <p:sldId id="266" r:id="rId12"/>
     <p:sldId id="267" r:id="rId13"/>
+    <p:sldId id="271" r:id="rId22"/>
+    <p:sldId id="272" r:id="rId23"/>
     <p:sldId id="268" r:id="rId14"/>
     <p:sldId id="269" r:id="rId15"/>
     <p:sldId id="270" r:id="rId16"/>
@@ -1910,7 +1912,7 @@
                     <c:v>Total_Workouts</c:v>
                   </c:pt>
                   <c:pt idx="1">
-                    <c:v>Premium Subscription</c:v>
+                    <c:v>Completion Rate</c:v>
                   </c:pt>
                 </c:lvl>
               </c:multiLvlStrCache>
@@ -1923,10 +1925,10 @@
                 <c:formatCode>General</c:formatCode>
                 <c:ptCount val="2"/>
                 <c:pt idx="0">
-                  <c:v>2.21</c:v>
+                  <c:v>3.09</c:v>
                 </c:pt>
                 <c:pt idx="1">
-                  <c:v>0.62</c:v>
+                  <c:v>1.36</c:v>
                 </c:pt>
               </c:numCache>
             </c:numRef>
@@ -4092,6 +4094,10 @@
           </a:solidFill>
           <a:ln/>
         </p:spPr>
+        <p:txBody>
+          <a:bodyPr/>
+          <a:p/>
+        </p:txBody>
       </p:sp>
       <p:sp>
         <p:nvSpPr>
@@ -4114,6 +4120,10 @@
           </a:solidFill>
           <a:ln/>
         </p:spPr>
+        <p:txBody>
+          <a:bodyPr/>
+          <a:p/>
+        </p:txBody>
       </p:sp>
       <p:sp>
         <p:nvSpPr>
@@ -4268,6 +4278,10 @@
             </a:outerShdw>
           </a:effectLst>
         </p:spPr>
+        <p:txBody>
+          <a:bodyPr/>
+          <a:p/>
+        </p:txBody>
       </p:sp>
       <p:sp>
         <p:nvSpPr>
@@ -4470,6 +4484,10 @@
             </a:outerShdw>
           </a:effectLst>
         </p:spPr>
+        <p:txBody>
+          <a:bodyPr/>
+          <a:p/>
+        </p:txBody>
       </p:sp>
       <p:sp>
         <p:nvSpPr>
@@ -4529,6 +4547,10 @@
           </a:solidFill>
           <a:ln/>
         </p:spPr>
+        <p:txBody>
+          <a:bodyPr/>
+          <a:p/>
+        </p:txBody>
       </p:sp>
       <p:sp>
         <p:nvSpPr>
@@ -4563,6 +4585,10 @@
             </a:outerShdw>
           </a:effectLst>
         </p:spPr>
+        <p:txBody>
+          <a:bodyPr/>
+          <a:p/>
+        </p:txBody>
       </p:sp>
       <p:sp>
         <p:nvSpPr>
@@ -4675,6 +4701,10 @@
             </a:outerShdw>
           </a:effectLst>
         </p:spPr>
+        <p:txBody>
+          <a:bodyPr/>
+          <a:p/>
+        </p:txBody>
       </p:sp>
       <p:sp>
         <p:nvSpPr>
@@ -4994,6 +5024,10 @@
             </a:outerShdw>
           </a:effectLst>
         </p:spPr>
+        <p:txBody>
+          <a:bodyPr/>
+          <a:p/>
+        </p:txBody>
       </p:sp>
       <p:sp>
         <p:nvSpPr>
@@ -5016,6 +5050,10 @@
           </a:solidFill>
           <a:ln/>
         </p:spPr>
+        <p:txBody>
+          <a:bodyPr/>
+          <a:p/>
+        </p:txBody>
       </p:sp>
       <p:sp>
         <p:nvSpPr>
@@ -5170,6 +5208,10 @@
             </a:outerShdw>
           </a:effectLst>
         </p:spPr>
+        <p:txBody>
+          <a:bodyPr/>
+          <a:p/>
+        </p:txBody>
       </p:sp>
       <p:sp>
         <p:nvSpPr>
@@ -5192,6 +5234,10 @@
           </a:solidFill>
           <a:ln/>
         </p:spPr>
+        <p:txBody>
+          <a:bodyPr/>
+          <a:p/>
+        </p:txBody>
       </p:sp>
       <p:sp>
         <p:nvSpPr>
@@ -5346,6 +5392,10 @@
             </a:outerShdw>
           </a:effectLst>
         </p:spPr>
+        <p:txBody>
+          <a:bodyPr/>
+          <a:p/>
+        </p:txBody>
       </p:sp>
       <p:sp>
         <p:nvSpPr>
@@ -5461,6 +5511,10 @@
             </a:outerShdw>
           </a:effectLst>
         </p:spPr>
+        <p:txBody>
+          <a:bodyPr/>
+          <a:p/>
+        </p:txBody>
       </p:sp>
       <p:sp>
         <p:nvSpPr>
@@ -5554,6 +5608,10 @@
             </a:outerShdw>
           </a:effectLst>
         </p:spPr>
+        <p:txBody>
+          <a:bodyPr/>
+          <a:p/>
+        </p:txBody>
       </p:sp>
       <p:sp>
         <p:nvSpPr>
@@ -5647,6 +5705,10 @@
             </a:outerShdw>
           </a:effectLst>
         </p:spPr>
+        <p:txBody>
+          <a:bodyPr/>
+          <a:p/>
+        </p:txBody>
       </p:sp>
       <p:sp>
         <p:nvSpPr>
@@ -5740,7 +5802,7 @@
                 <a:ea typeface="Calibri" pitchFamily="34" charset="-122"/>
                 <a:cs typeface="Calibri" pitchFamily="34" charset="-120"/>
               </a:rPr>
-              <a:t>FitTech App Analytics  |  10 / 15</a:t>
+              <a:t>FitTech App Analytics  |  10 / 17</a:t>
             </a:r>
             <a:endParaRPr lang="en-US" sz="900" dirty="0"/>
           </a:p>
@@ -5903,7 +5965,7 @@
                 <a:ea typeface="Calibri" pitchFamily="34" charset="-122"/>
                 <a:cs typeface="Calibri" pitchFamily="34" charset="-120"/>
               </a:rPr>
-              <a:t>High_Engagement_Flag</a:t>
+              <a:t>User_Engagement_Level</a:t>
             </a:r>
             <a:pPr algn="ctr" indent="0" marL="0">
               <a:buNone/>
@@ -5917,7 +5979,7 @@
                 <a:ea typeface="Calibri" pitchFamily="34" charset="-122"/>
                 <a:cs typeface="Calibri" pitchFamily="34" charset="-120"/>
               </a:rPr>
-              <a:t> — users with Total Session Time ≥ 5,943 minutes are marked high engagement.</a:t>
+              <a:t> — the real business-assigned Low/Medium/High tier (200 users each), validated against behavior.</a:t>
             </a:r>
             <a:endParaRPr lang="en-US" sz="1250" dirty="0"/>
           </a:p>
@@ -5956,6 +6018,10 @@
             </a:outerShdw>
           </a:effectLst>
         </p:spPr>
+        <p:txBody>
+          <a:bodyPr/>
+          <a:p/>
+        </p:txBody>
       </p:sp>
       <p:sp>
         <p:nvSpPr>
@@ -5980,6 +6046,10 @@
           </a:solidFill>
           <a:ln/>
         </p:spPr>
+        <p:txBody>
+          <a:bodyPr/>
+          <a:p/>
+        </p:txBody>
       </p:sp>
       <p:sp>
         <p:nvSpPr>
@@ -6095,7 +6165,7 @@
                 <a:ea typeface="Calibri" pitchFamily="34" charset="-122"/>
                 <a:cs typeface="Calibri" pitchFamily="34" charset="-120"/>
               </a:rPr>
-              <a:t>Accuracy: 72.5%   |   High-engagement recall: 73%</a:t>
+              <a:t>Accuracy: 67.5%   |   vs. 33% random-guess baseline</a:t>
             </a:r>
             <a:endParaRPr lang="en-US" sz="1150" dirty="0"/>
           </a:p>
@@ -6137,7 +6207,7 @@
                 <a:ea typeface="Calibri" pitchFamily="34" charset="-122"/>
                 <a:cs typeface="Calibri" pitchFamily="34" charset="-120"/>
               </a:rPr>
-              <a:t>Correctly identifies 44/60 truly high-engagement and 43/60 truly low-engagement users (17 false alarms, 16 missed).</a:t>
+              <a:t>Correctly identifies 27/40 Low, 24/40 Medium, and 30/40 High users — and never confuses Low with High directly.</a:t>
             </a:r>
             <a:endParaRPr lang="en-US" sz="1100" dirty="0"/>
           </a:p>
@@ -6165,6 +6235,10 @@
             <a:prstDash val="solid"/>
           </a:ln>
         </p:spPr>
+        <p:txBody>
+          <a:bodyPr/>
+          <a:p/>
+        </p:txBody>
       </p:sp>
       <p:sp>
         <p:nvSpPr>
@@ -6202,7 +6276,7 @@
                 <a:ea typeface="Calibri" pitchFamily="34" charset="-122"/>
                 <a:cs typeface="Calibri" pitchFamily="34" charset="-120"/>
               </a:rPr>
-              <a:t>Coefficients are directly explainable — the business can defend exactly which behaviors raise or lower engagement probability.</a:t>
+              <a:t>Virtually tied with Decision Tree on accuracy, but coefficients are directly explainable — the business can defend exactly which behaviors drive each tier.</a:t>
             </a:r>
             <a:endParaRPr lang="en-US" sz="1100" dirty="0"/>
           </a:p>
@@ -6241,6 +6315,10 @@
             </a:outerShdw>
           </a:effectLst>
         </p:spPr>
+        <p:txBody>
+          <a:bodyPr/>
+          <a:p/>
+        </p:txBody>
       </p:sp>
       <p:sp>
         <p:nvSpPr>
@@ -6265,6 +6343,10 @@
           </a:solidFill>
           <a:ln/>
         </p:spPr>
+        <p:txBody>
+          <a:bodyPr/>
+          <a:p/>
+        </p:txBody>
       </p:sp>
       <p:sp>
         <p:nvSpPr>
@@ -6380,7 +6462,7 @@
                 <a:ea typeface="Calibri" pitchFamily="34" charset="-122"/>
                 <a:cs typeface="Calibri" pitchFamily="34" charset="-120"/>
               </a:rPr>
-              <a:t>Accuracy: 64.2%   |   High-engagement recall: 70%</a:t>
+              <a:t>Accuracy: 43.3%   |   weakest of the three</a:t>
             </a:r>
             <a:endParaRPr lang="en-US" sz="1150" dirty="0"/>
           </a:p>
@@ -6422,7 +6504,7 @@
                 <a:ea typeface="Calibri" pitchFamily="34" charset="-122"/>
                 <a:cs typeface="Calibri" pitchFamily="34" charset="-120"/>
               </a:rPr>
-              <a:t>Finds 42/60 high-engagement users but only 35/60 low-engagement users — 25 false alarms, the weakest of the three.</a:t>
+              <a:t>Finds 23/40 Low and 22/40 High, but only 7/40 Medium — and sometimes confuses Low directly with High.</a:t>
             </a:r>
             <a:endParaRPr lang="en-US" sz="1100" dirty="0"/>
           </a:p>
@@ -6450,6 +6532,10 @@
             <a:prstDash val="solid"/>
           </a:ln>
         </p:spPr>
+        <p:txBody>
+          <a:bodyPr/>
+          <a:p/>
+        </p:txBody>
       </p:sp>
       <p:sp>
         <p:nvSpPr>
@@ -6526,6 +6612,10 @@
             </a:outerShdw>
           </a:effectLst>
         </p:spPr>
+        <p:txBody>
+          <a:bodyPr/>
+          <a:p/>
+        </p:txBody>
       </p:sp>
       <p:sp>
         <p:nvSpPr>
@@ -6550,6 +6640,10 @@
           </a:solidFill>
           <a:ln/>
         </p:spPr>
+        <p:txBody>
+          <a:bodyPr/>
+          <a:p/>
+        </p:txBody>
       </p:sp>
       <p:sp>
         <p:nvSpPr>
@@ -6665,7 +6759,7 @@
                 <a:ea typeface="Calibri" pitchFamily="34" charset="-122"/>
                 <a:cs typeface="Calibri" pitchFamily="34" charset="-120"/>
               </a:rPr>
-              <a:t>Accuracy: 77.5%   |   High-engagement recall: 73%</a:t>
+              <a:t>Accuracy: 68.3%   |   highest raw accuracy</a:t>
             </a:r>
             <a:endParaRPr lang="en-US" sz="1150" dirty="0"/>
           </a:p>
@@ -6707,7 +6801,7 @@
                 <a:ea typeface="Calibri" pitchFamily="34" charset="-122"/>
                 <a:cs typeface="Calibri" pitchFamily="34" charset="-120"/>
               </a:rPr>
-              <a:t>Finds 44/60 high-engagement and 49/60 low-engagement users — highest raw accuracy, only 11 false alarms.</a:t>
+              <a:t>Finds 30/40 Low, 21/40 Medium, and 31/40 High — highest raw accuracy, never confuses Low with High.</a:t>
             </a:r>
             <a:endParaRPr lang="en-US" sz="1100" dirty="0"/>
           </a:p>
@@ -6735,6 +6829,10 @@
             <a:prstDash val="solid"/>
           </a:ln>
         </p:spPr>
+        <p:txBody>
+          <a:bodyPr/>
+          <a:p/>
+        </p:txBody>
       </p:sp>
       <p:sp>
         <p:nvSpPr>
@@ -6772,7 +6870,7 @@
                 <a:ea typeface="Calibri" pitchFamily="34" charset="-122"/>
                 <a:cs typeface="Calibri" pitchFamily="34" charset="-120"/>
               </a:rPr>
-              <a:t>Despite top accuracy, a single tree is less stable on 600 users, and its branching rules are harder for stakeholders to generalize from.</a:t>
+              <a:t>Leads by less than 1 point; branching rules are harder for stakeholders to generalize from than Logistic Regression's coefficients.</a:t>
             </a:r>
             <a:endParaRPr lang="en-US" sz="1100" dirty="0"/>
           </a:p>
@@ -6811,7 +6909,7 @@
                 <a:ea typeface="Calibri" pitchFamily="34" charset="-122"/>
                 <a:cs typeface="Calibri" pitchFamily="34" charset="-120"/>
               </a:rPr>
-              <a:t>FitTech App Analytics  |  11 / 15</a:t>
+              <a:t>FitTech App Analytics  |  11 / 17</a:t>
             </a:r>
             <a:endParaRPr lang="en-US" sz="900" dirty="0"/>
           </a:p>
@@ -7002,7 +7100,7 @@
                 <a:ea typeface="Calibri" pitchFamily="34" charset="-122"/>
                 <a:cs typeface="Calibri" pitchFamily="34" charset="-120"/>
               </a:rPr>
-              <a:t>Logistic Regression was chosen not just for its 72.5% accuracy, but for its perfect business explainability.</a:t>
+              <a:t>Logistic Regression was chosen not just for its 67.5% accuracy (virtually tied with Decision Tree's 68.3%), but for its perfect business explainability.</a:t>
             </a:r>
             <a:endParaRPr lang="en-US" sz="1300" dirty="0"/>
           </a:p>
@@ -7044,7 +7142,7 @@
                 <a:ea typeface="Calibri" pitchFamily="34" charset="-122"/>
                 <a:cs typeface="Calibri" pitchFamily="34" charset="-120"/>
               </a:rPr>
-              <a:t>Raw workout frequency dwarfs every other factor</a:t>
+              <a:t>Workout frequency dominates the 'High' engagement tier</a:t>
             </a:r>
             <a:pPr indent="0" marL="0">
               <a:lnSpc>
@@ -7061,7 +7159,7 @@
                 <a:ea typeface="Calibri" pitchFamily="34" charset="-122"/>
                 <a:cs typeface="Calibri" pitchFamily="34" charset="-120"/>
               </a:rPr>
-              <a:t> — over 3x the next-largest driver, Premium subscription. Once workout frequency is in the model, Completion Rate and Purchase Rate carry small negative coefficients: their simple correlation with engagement is already explained by how often a user works out.</a:t>
+              <a:t> — more than 2x the next driver, Completion Rate. Notification Click Rate also pushes users toward High engagement. Purchase Rate, however, carries almost no weight: buying behavior and being a highly-engaged user are largely independent in this data.</a:t>
             </a:r>
             <a:endParaRPr lang="en-US" sz="1300" dirty="0"/>
           </a:p>
@@ -7100,6 +7198,10 @@
             </a:outerShdw>
           </a:effectLst>
         </p:spPr>
+        <p:txBody>
+          <a:bodyPr/>
+          <a:p/>
+        </p:txBody>
       </p:sp>
       <p:sp>
         <p:nvSpPr>
@@ -7154,7 +7256,7 @@
                 <a:ea typeface="Calibri" pitchFamily="34" charset="-122"/>
                 <a:cs typeface="Calibri" pitchFamily="34" charset="-120"/>
               </a:rPr>
-              <a:t>drive workout frequency and Premium conversion first — together the two strongest mathematical predictors of high engagement, far ahead of notification or completion-rate effects.</a:t>
+              <a:t>drive workout frequency, completion, and notification response to grow the real High-engagement segment — purchase-focused campaigns are a separate, weakly-related lever.</a:t>
             </a:r>
             <a:endParaRPr lang="en-US" sz="1200" dirty="0"/>
           </a:p>
@@ -7193,7 +7295,7 @@
                 <a:ea typeface="Calibri" pitchFamily="34" charset="-122"/>
                 <a:cs typeface="Calibri" pitchFamily="34" charset="-120"/>
               </a:rPr>
-              <a:t>Logistic Regression: Feature Coefficients</a:t>
+              <a:t>Logistic Regression: Drivers of the 'High' Tier</a:t>
             </a:r>
             <a:endParaRPr lang="en-US" sz="1400" dirty="0"/>
           </a:p>
@@ -7248,6 +7350,10 @@
             </a:outerShdw>
           </a:effectLst>
         </p:spPr>
+        <p:txBody>
+          <a:bodyPr/>
+          <a:p/>
+        </p:txBody>
       </p:sp>
       <p:sp>
         <p:nvSpPr>
@@ -7302,7 +7408,7 @@
                 <a:ea typeface="Calibri" pitchFamily="34" charset="-122"/>
                 <a:cs typeface="Calibri" pitchFamily="34" charset="-120"/>
               </a:rPr>
-              <a:t>Completion Rate and Purchase Rate each carry small negative coefficients once workout frequency is accounted for; Age Group and Goal Type contribute smaller effects still.</a:t>
+              <a:t>Total Steps and Premium Subscription contribute smaller positive effects; Purchase Rate is the only negative driver once workout frequency is accounted for.</a:t>
             </a:r>
             <a:endParaRPr lang="en-US" sz="1100" dirty="0"/>
           </a:p>
@@ -7341,7 +7447,7 @@
                 <a:ea typeface="Calibri" pitchFamily="34" charset="-122"/>
                 <a:cs typeface="Calibri" pitchFamily="34" charset="-120"/>
               </a:rPr>
-              <a:t>FitTech App Analytics  |  12 / 15</a:t>
+              <a:t>FitTech App Analytics  |  12 / 17</a:t>
             </a:r>
             <a:endParaRPr lang="en-US" sz="900" dirty="0"/>
           </a:p>
@@ -7356,6 +7462,880 @@
 </file>
 
 <file path=ppt/slides/slide13.xml><?xml version="1.0" encoding="utf-8"?>
+<p:sld xmlns:a="http://schemas.openxmlformats.org/drawingml/2006/main" xmlns:p="http://schemas.openxmlformats.org/presentationml/2006/main" xmlns:r="http://schemas.openxmlformats.org/officeDocument/2006/relationships">
+  <p:cSld>
+    <p:bg>
+      <p:bgPr>
+        <a:solidFill>
+          <a:srgbClr val="0B1120"/>
+        </a:solidFill>
+      </p:bgPr>
+    </p:bg>
+    <p:spTree>
+      <p:nvGrpSpPr>
+        <p:cNvPr id="1" name=""/>
+        <p:cNvGrpSpPr/>
+        <p:nvPr/>
+      </p:nvGrpSpPr>
+      <p:grpSpPr/>
+      <p:sp>
+        <p:nvSpPr>
+          <p:cNvPr id="2" name="TextBox 1"/>
+          <p:cNvSpPr txBox="1"/>
+          <p:nvPr/>
+        </p:nvSpPr>
+        <p:spPr>
+          <a:xfrm>
+            <a:off x="548640" y="164592"/>
+            <a:ext cx="7315200" cy="274320"/>
+          </a:xfrm>
+          <a:prstGeom prst="rect">
+            <a:avLst/>
+          </a:prstGeom>
+          <a:noFill/>
+        </p:spPr>
+        <p:txBody>
+          <a:bodyPr wrap="square">
+            <a:spAutoFit/>
+          </a:bodyPr>
+          <a:lstStyle/>
+          <a:p>
+            <a:pPr algn="l"/>
+            <a:r>
+              <a:rPr sz="1100" b="1">
+                <a:solidFill>
+                  <a:srgbClr val="10B981"/>
+                </a:solidFill>
+                <a:latin typeface="Calibri"/>
+              </a:rPr>
+              <a:t>OBJECTIVE 3</a:t>
+            </a:r>
+          </a:p>
+        </p:txBody>
+      </p:sp>
+      <p:sp>
+        <p:nvSpPr>
+          <p:cNvPr id="3" name="TextBox 2"/>
+          <p:cNvSpPr txBox="1"/>
+          <p:nvPr/>
+        </p:nvSpPr>
+        <p:spPr>
+          <a:xfrm>
+            <a:off x="548640" y="365760"/>
+            <a:ext cx="11094415" cy="731520"/>
+          </a:xfrm>
+          <a:prstGeom prst="rect">
+            <a:avLst/>
+          </a:prstGeom>
+          <a:noFill/>
+        </p:spPr>
+        <p:txBody>
+          <a:bodyPr wrap="square">
+            <a:spAutoFit/>
+          </a:bodyPr>
+          <a:lstStyle/>
+          <a:p>
+            <a:pPr algn="l"/>
+            <a:r>
+              <a:rPr sz="3000" b="1">
+                <a:solidFill>
+                  <a:srgbClr val="FFFFFF"/>
+                </a:solidFill>
+                <a:latin typeface="Cambria"/>
+              </a:rPr>
+              <a:t>Linear Regression: Predicting Session Time</a:t>
+            </a:r>
+          </a:p>
+        </p:txBody>
+      </p:sp>
+      <p:sp>
+        <p:nvSpPr>
+          <p:cNvPr id="4" name="TextBox 3"/>
+          <p:cNvSpPr txBox="1"/>
+          <p:nvPr/>
+        </p:nvSpPr>
+        <p:spPr>
+          <a:xfrm>
+            <a:off x="640080" y="1371600"/>
+            <a:ext cx="5394960" cy="457200"/>
+          </a:xfrm>
+          <a:prstGeom prst="rect">
+            <a:avLst/>
+          </a:prstGeom>
+          <a:noFill/>
+        </p:spPr>
+        <p:txBody>
+          <a:bodyPr wrap="square">
+            <a:spAutoFit/>
+          </a:bodyPr>
+          <a:lstStyle/>
+          <a:p>
+            <a:pPr algn="l"/>
+            <a:r>
+              <a:rPr sz="2200" b="1">
+                <a:solidFill>
+                  <a:srgbClr val="3B82F6"/>
+                </a:solidFill>
+                <a:latin typeface="Cambria"/>
+              </a:rPr>
+              <a:t>From Categories to a Number</a:t>
+            </a:r>
+          </a:p>
+        </p:txBody>
+      </p:sp>
+      <p:sp>
+        <p:nvSpPr>
+          <p:cNvPr id="5" name="TextBox 4"/>
+          <p:cNvSpPr txBox="1"/>
+          <p:nvPr/>
+        </p:nvSpPr>
+        <p:spPr>
+          <a:xfrm>
+            <a:off x="640080" y="1920240"/>
+            <a:ext cx="5394960" cy="594360"/>
+          </a:xfrm>
+          <a:prstGeom prst="rect">
+            <a:avLst/>
+          </a:prstGeom>
+          <a:noFill/>
+        </p:spPr>
+        <p:txBody>
+          <a:bodyPr wrap="square">
+            <a:spAutoFit/>
+          </a:bodyPr>
+          <a:lstStyle/>
+          <a:p>
+            <a:pPr algn="l">
+              <a:lnSpc>
+                <a:spcPct val="115000"/>
+              </a:lnSpc>
+            </a:pPr>
+            <a:r>
+              <a:rPr sz="1300" b="0">
+                <a:solidFill>
+                  <a:srgbClr val="9CA3AF"/>
+                </a:solidFill>
+                <a:latin typeface="Calibri"/>
+              </a:rPr>
+              <a:t>Classification predicts a tier; regression predicts an actual quantity. Linear Regression estimates a user's Total Session Time directly, using the same demographic and behavioral inputs as the classification models.</a:t>
+            </a:r>
+          </a:p>
+        </p:txBody>
+      </p:sp>
+      <p:sp>
+        <p:nvSpPr>
+          <p:cNvPr id="6" name="TextBox 5"/>
+          <p:cNvSpPr txBox="1"/>
+          <p:nvPr/>
+        </p:nvSpPr>
+        <p:spPr>
+          <a:xfrm>
+            <a:off x="640080" y="2606040"/>
+            <a:ext cx="5394960" cy="1371600"/>
+          </a:xfrm>
+          <a:prstGeom prst="rect">
+            <a:avLst/>
+          </a:prstGeom>
+          <a:noFill/>
+        </p:spPr>
+        <p:txBody>
+          <a:bodyPr wrap="square">
+            <a:spAutoFit/>
+          </a:bodyPr>
+          <a:lstStyle/>
+          <a:p>
+            <a:pPr algn="l">
+              <a:lnSpc>
+                <a:spcPct val="115000"/>
+              </a:lnSpc>
+            </a:pPr>
+            <a:r>
+              <a:rPr sz="1300" b="1">
+                <a:solidFill>
+                  <a:srgbClr val="FFFFFF"/>
+                </a:solidFill>
+                <a:latin typeface="Calibri"/>
+              </a:rPr>
+              <a:t>On unseen test users, predictions are typically off by about 298 minutes (MAE), </a:t>
+            </a:r>
+            <a:r>
+              <a:rPr sz="1300" b="0">
+                <a:solidFill>
+                  <a:srgbClr val="9CA3AF"/>
+                </a:solidFill>
+                <a:latin typeface="Calibri"/>
+              </a:rPr>
+              <a:t>and the model explains 55% of the variation (R²) in session time — a solid baseline, not a production-grade forecast.</a:t>
+            </a:r>
+          </a:p>
+        </p:txBody>
+      </p:sp>
+      <p:sp>
+        <p:nvSpPr>
+          <p:cNvPr id="7" name="Rectangle 6"/>
+          <p:cNvSpPr/>
+          <p:nvPr/>
+        </p:nvSpPr>
+        <p:spPr>
+          <a:xfrm>
+            <a:off x="640080" y="4160520"/>
+            <a:ext cx="5394960" cy="1417320"/>
+          </a:xfrm>
+          <a:prstGeom prst="rect">
+            <a:avLst/>
+          </a:prstGeom>
+          <a:solidFill>
+            <a:srgbClr val="0C1A2E"/>
+          </a:solidFill>
+          <a:ln w="12700">
+            <a:solidFill>
+              <a:srgbClr val="38BDF8"/>
+            </a:solidFill>
+          </a:ln>
+        </p:spPr>
+        <p:style>
+          <a:lnRef idx="1">
+            <a:schemeClr val="accent1"/>
+          </a:lnRef>
+          <a:fillRef idx="3">
+            <a:schemeClr val="accent1"/>
+          </a:fillRef>
+          <a:effectRef idx="2">
+            <a:schemeClr val="accent1"/>
+          </a:effectRef>
+          <a:fontRef idx="minor">
+            <a:schemeClr val="lt1"/>
+          </a:fontRef>
+        </p:style>
+        <p:txBody>
+          <a:bodyPr rtlCol="0" anchor="ctr" wrap="square" lIns="228600" tIns="137160" rIns="137160"/>
+          <a:lstStyle/>
+          <a:p>
+            <a:pPr algn="ctr"/>
+            <a:r>
+              <a:rPr sz="1200" b="1">
+                <a:solidFill>
+                  <a:srgbClr val="38BDF8"/>
+                </a:solidFill>
+                <a:latin typeface="Calibri"/>
+              </a:rPr>
+              <a:t>Business use:  </a:t>
+            </a:r>
+            <a:r>
+              <a:rPr sz="1200" b="0">
+                <a:solidFill>
+                  <a:srgbClr val="F3F4F6"/>
+                </a:solidFill>
+                <a:latin typeface="Calibri"/>
+              </a:rPr>
+              <a:t>Estimate expected engagement depth per user to support lifetime-value planning and capacity forecasting, alongside the Low/Medium/High classification.</a:t>
+            </a:r>
+          </a:p>
+        </p:txBody>
+      </p:sp>
+      <p:sp>
+        <p:nvSpPr>
+          <p:cNvPr id="8" name="TextBox 7"/>
+          <p:cNvSpPr txBox="1"/>
+          <p:nvPr/>
+        </p:nvSpPr>
+        <p:spPr>
+          <a:xfrm>
+            <a:off x="6355080" y="1371600"/>
+            <a:ext cx="5212080" cy="365760"/>
+          </a:xfrm>
+          <a:prstGeom prst="rect">
+            <a:avLst/>
+          </a:prstGeom>
+          <a:noFill/>
+        </p:spPr>
+        <p:txBody>
+          <a:bodyPr wrap="square">
+            <a:spAutoFit/>
+          </a:bodyPr>
+          <a:lstStyle/>
+          <a:p>
+            <a:pPr algn="ctr"/>
+            <a:r>
+              <a:rPr sz="1400" b="1">
+                <a:solidFill>
+                  <a:srgbClr val="F3F4F6"/>
+                </a:solidFill>
+                <a:latin typeface="Calibri"/>
+              </a:rPr>
+              <a:t>Actual vs Predicted Session Time</a:t>
+            </a:r>
+          </a:p>
+        </p:txBody>
+      </p:sp>
+      <p:pic>
+        <p:nvPicPr>
+          <p:cNvPr id="9" name="Picture 8" descr="regression_chart.png"/>
+          <p:cNvPicPr>
+            <a:picLocks noChangeAspect="1"/>
+          </p:cNvPicPr>
+          <p:nvPr/>
+        </p:nvPicPr>
+        <p:blipFill>
+          <a:blip r:embed="rId2"/>
+          <a:stretch>
+            <a:fillRect/>
+          </a:stretch>
+        </p:blipFill>
+        <p:spPr>
+          <a:xfrm>
+            <a:off x="6355080" y="1783080"/>
+            <a:ext cx="5212080" cy="2286000"/>
+          </a:xfrm>
+          <a:prstGeom prst="rect">
+            <a:avLst/>
+          </a:prstGeom>
+        </p:spPr>
+      </p:pic>
+      <p:sp>
+        <p:nvSpPr>
+          <p:cNvPr id="10" name="Rectangle 9"/>
+          <p:cNvSpPr/>
+          <p:nvPr/>
+        </p:nvSpPr>
+        <p:spPr>
+          <a:xfrm>
+            <a:off x="6355080" y="4206240"/>
+            <a:ext cx="5212080" cy="1371600"/>
+          </a:xfrm>
+          <a:prstGeom prst="rect">
+            <a:avLst/>
+          </a:prstGeom>
+          <a:solidFill>
+            <a:srgbClr val="0C1A2E"/>
+          </a:solidFill>
+          <a:ln w="12700">
+            <a:solidFill>
+              <a:srgbClr val="38BDF8"/>
+            </a:solidFill>
+          </a:ln>
+        </p:spPr>
+        <p:style>
+          <a:lnRef idx="1">
+            <a:schemeClr val="accent1"/>
+          </a:lnRef>
+          <a:fillRef idx="3">
+            <a:schemeClr val="accent1"/>
+          </a:fillRef>
+          <a:effectRef idx="2">
+            <a:schemeClr val="accent1"/>
+          </a:effectRef>
+          <a:fontRef idx="minor">
+            <a:schemeClr val="lt1"/>
+          </a:fontRef>
+        </p:style>
+        <p:txBody>
+          <a:bodyPr rtlCol="0" anchor="ctr" wrap="square" lIns="228600" tIns="137160" rIns="137160"/>
+          <a:lstStyle/>
+          <a:p>
+            <a:pPr algn="ctr"/>
+            <a:r>
+              <a:rPr sz="1200" b="1">
+                <a:solidFill>
+                  <a:srgbClr val="38BDF8"/>
+                </a:solidFill>
+                <a:latin typeface="Calibri"/>
+              </a:rPr>
+              <a:t>Insight:  </a:t>
+            </a:r>
+            <a:r>
+              <a:rPr sz="1200" b="0">
+                <a:solidFill>
+                  <a:srgbClr val="F3F4F6"/>
+                </a:solidFill>
+                <a:latin typeface="Calibri"/>
+              </a:rPr>
+              <a:t>MAE ≈ 298 min | RMSE ≈ 361 min | R² ≈ 0.55. Points near the diagonal are accurate predictions.</a:t>
+            </a:r>
+          </a:p>
+        </p:txBody>
+      </p:sp>
+      <p:sp>
+        <p:nvSpPr>
+          <p:cNvPr id="11" name="TextBox 10"/>
+          <p:cNvSpPr txBox="1"/>
+          <p:nvPr/>
+        </p:nvSpPr>
+        <p:spPr>
+          <a:xfrm>
+            <a:off x="548640" y="6473952"/>
+            <a:ext cx="5486400" cy="274320"/>
+          </a:xfrm>
+          <a:prstGeom prst="rect">
+            <a:avLst/>
+          </a:prstGeom>
+          <a:noFill/>
+        </p:spPr>
+        <p:txBody>
+          <a:bodyPr wrap="square">
+            <a:spAutoFit/>
+          </a:bodyPr>
+          <a:lstStyle/>
+          <a:p>
+            <a:pPr algn="l"/>
+            <a:r>
+              <a:rPr sz="900" b="0">
+                <a:solidFill>
+                  <a:srgbClr val="4B5568"/>
+                </a:solidFill>
+                <a:latin typeface="Calibri"/>
+              </a:rPr>
+              <a:t>FitTech App Analytics  |  13 / 17</a:t>
+            </a:r>
+          </a:p>
+        </p:txBody>
+      </p:sp>
+    </p:spTree>
+  </p:cSld>
+  <p:clrMapOvr>
+    <a:masterClrMapping/>
+  </p:clrMapOvr>
+</p:sld>
+</file>
+
+<file path=ppt/slides/slide14.xml><?xml version="1.0" encoding="utf-8"?>
+<p:sld xmlns:a="http://schemas.openxmlformats.org/drawingml/2006/main" xmlns:p="http://schemas.openxmlformats.org/presentationml/2006/main" xmlns:r="http://schemas.openxmlformats.org/officeDocument/2006/relationships">
+  <p:cSld>
+    <p:bg>
+      <p:bgPr>
+        <a:solidFill>
+          <a:srgbClr val="0B1120"/>
+        </a:solidFill>
+      </p:bgPr>
+    </p:bg>
+    <p:spTree>
+      <p:nvGrpSpPr>
+        <p:cNvPr id="1" name=""/>
+        <p:cNvGrpSpPr/>
+        <p:nvPr/>
+      </p:nvGrpSpPr>
+      <p:grpSpPr/>
+      <p:sp>
+        <p:nvSpPr>
+          <p:cNvPr id="2" name="TextBox 1"/>
+          <p:cNvSpPr txBox="1"/>
+          <p:nvPr/>
+        </p:nvSpPr>
+        <p:spPr>
+          <a:xfrm>
+            <a:off x="548640" y="164592"/>
+            <a:ext cx="7315200" cy="274320"/>
+          </a:xfrm>
+          <a:prstGeom prst="rect">
+            <a:avLst/>
+          </a:prstGeom>
+          <a:noFill/>
+        </p:spPr>
+        <p:txBody>
+          <a:bodyPr wrap="square">
+            <a:spAutoFit/>
+          </a:bodyPr>
+          <a:lstStyle/>
+          <a:p>
+            <a:pPr algn="l"/>
+            <a:r>
+              <a:rPr sz="1100" b="1">
+                <a:solidFill>
+                  <a:srgbClr val="10B981"/>
+                </a:solidFill>
+                <a:latin typeface="Calibri"/>
+              </a:rPr>
+              <a:t>OBJECTIVE 3</a:t>
+            </a:r>
+          </a:p>
+        </p:txBody>
+      </p:sp>
+      <p:sp>
+        <p:nvSpPr>
+          <p:cNvPr id="3" name="TextBox 2"/>
+          <p:cNvSpPr txBox="1"/>
+          <p:nvPr/>
+        </p:nvSpPr>
+        <p:spPr>
+          <a:xfrm>
+            <a:off x="548640" y="365760"/>
+            <a:ext cx="11094415" cy="731520"/>
+          </a:xfrm>
+          <a:prstGeom prst="rect">
+            <a:avLst/>
+          </a:prstGeom>
+          <a:noFill/>
+        </p:spPr>
+        <p:txBody>
+          <a:bodyPr wrap="square">
+            <a:spAutoFit/>
+          </a:bodyPr>
+          <a:lstStyle/>
+          <a:p>
+            <a:pPr algn="l"/>
+            <a:r>
+              <a:rPr sz="3000" b="1">
+                <a:solidFill>
+                  <a:srgbClr val="FFFFFF"/>
+                </a:solidFill>
+                <a:latin typeface="Cambria"/>
+              </a:rPr>
+              <a:t>K-Means Clustering: Two Real User Segments</a:t>
+            </a:r>
+          </a:p>
+        </p:txBody>
+      </p:sp>
+      <p:sp>
+        <p:nvSpPr>
+          <p:cNvPr id="4" name="TextBox 3"/>
+          <p:cNvSpPr txBox="1"/>
+          <p:nvPr/>
+        </p:nvSpPr>
+        <p:spPr>
+          <a:xfrm>
+            <a:off x="640080" y="1371600"/>
+            <a:ext cx="5394960" cy="457200"/>
+          </a:xfrm>
+          <a:prstGeom prst="rect">
+            <a:avLst/>
+          </a:prstGeom>
+          <a:noFill/>
+        </p:spPr>
+        <p:txBody>
+          <a:bodyPr wrap="square">
+            <a:spAutoFit/>
+          </a:bodyPr>
+          <a:lstStyle/>
+          <a:p>
+            <a:pPr algn="l"/>
+            <a:r>
+              <a:rPr sz="2200" b="1">
+                <a:solidFill>
+                  <a:srgbClr val="8B5CF6"/>
+                </a:solidFill>
+                <a:latin typeface="Cambria"/>
+              </a:rPr>
+              <a:t>Segmenting for Adaptive Reminders</a:t>
+            </a:r>
+          </a:p>
+        </p:txBody>
+      </p:sp>
+      <p:sp>
+        <p:nvSpPr>
+          <p:cNvPr id="5" name="TextBox 4"/>
+          <p:cNvSpPr txBox="1"/>
+          <p:nvPr/>
+        </p:nvSpPr>
+        <p:spPr>
+          <a:xfrm>
+            <a:off x="640080" y="1920240"/>
+            <a:ext cx="5394960" cy="594360"/>
+          </a:xfrm>
+          <a:prstGeom prst="rect">
+            <a:avLst/>
+          </a:prstGeom>
+          <a:noFill/>
+        </p:spPr>
+        <p:txBody>
+          <a:bodyPr wrap="square">
+            <a:spAutoFit/>
+          </a:bodyPr>
+          <a:lstStyle/>
+          <a:p>
+            <a:pPr algn="l">
+              <a:lnSpc>
+                <a:spcPct val="115000"/>
+              </a:lnSpc>
+            </a:pPr>
+            <a:r>
+              <a:rPr sz="1300" b="0">
+                <a:solidFill>
+                  <a:srgbClr val="9CA3AF"/>
+                </a:solidFill>
+                <a:latin typeface="Calibri"/>
+              </a:rPr>
+              <a:t>Clustering on Completion Rate, Purchase Rate, and Notification Click Rate — with k = 2 chosen because it wins decisively on silhouette, Davies-Bouldin, and Calinski-Harabasz scores, not picked for simplicity.</a:t>
+            </a:r>
+          </a:p>
+        </p:txBody>
+      </p:sp>
+      <p:sp>
+        <p:nvSpPr>
+          <p:cNvPr id="6" name="TextBox 5"/>
+          <p:cNvSpPr txBox="1"/>
+          <p:nvPr/>
+        </p:nvSpPr>
+        <p:spPr>
+          <a:xfrm>
+            <a:off x="640080" y="2606040"/>
+            <a:ext cx="5394960" cy="1371600"/>
+          </a:xfrm>
+          <a:prstGeom prst="rect">
+            <a:avLst/>
+          </a:prstGeom>
+          <a:noFill/>
+        </p:spPr>
+        <p:txBody>
+          <a:bodyPr wrap="square">
+            <a:spAutoFit/>
+          </a:bodyPr>
+          <a:lstStyle/>
+          <a:p>
+            <a:pPr algn="l">
+              <a:lnSpc>
+                <a:spcPct val="115000"/>
+              </a:lnSpc>
+            </a:pPr>
+            <a:r>
+              <a:rPr sz="1300" b="1">
+                <a:solidFill>
+                  <a:srgbClr val="FFFFFF"/>
+                </a:solidFill>
+                <a:latin typeface="Calibri"/>
+              </a:rPr>
+              <a:t>Purchase Rate is what actually separates the two groups, </a:t>
+            </a:r>
+            <a:r>
+              <a:rPr sz="1300" b="0">
+                <a:solidFill>
+                  <a:srgbClr val="9CA3AF"/>
+                </a:solidFill>
+                <a:latin typeface="Calibri"/>
+              </a:rPr>
+              <a:t>mirroring Subscription Type almost exactly: 249 Premium users converting at 25%, versus 351 Free users converting at just 6%. Completion Rate is nearly identical between them (0.75 both).</a:t>
+            </a:r>
+          </a:p>
+        </p:txBody>
+      </p:sp>
+      <p:sp>
+        <p:nvSpPr>
+          <p:cNvPr id="7" name="Rectangle 6"/>
+          <p:cNvSpPr/>
+          <p:nvPr/>
+        </p:nvSpPr>
+        <p:spPr>
+          <a:xfrm>
+            <a:off x="640080" y="4160520"/>
+            <a:ext cx="5394960" cy="1417320"/>
+          </a:xfrm>
+          <a:prstGeom prst="rect">
+            <a:avLst/>
+          </a:prstGeom>
+          <a:solidFill>
+            <a:srgbClr val="0C1A2E"/>
+          </a:solidFill>
+          <a:ln w="12700">
+            <a:solidFill>
+              <a:srgbClr val="38BDF8"/>
+            </a:solidFill>
+          </a:ln>
+        </p:spPr>
+        <p:style>
+          <a:lnRef idx="1">
+            <a:schemeClr val="accent1"/>
+          </a:lnRef>
+          <a:fillRef idx="3">
+            <a:schemeClr val="accent1"/>
+          </a:fillRef>
+          <a:effectRef idx="2">
+            <a:schemeClr val="accent1"/>
+          </a:effectRef>
+          <a:fontRef idx="minor">
+            <a:schemeClr val="lt1"/>
+          </a:fontRef>
+        </p:style>
+        <p:txBody>
+          <a:bodyPr rtlCol="0" anchor="ctr" wrap="square" lIns="228600" tIns="137160" rIns="137160"/>
+          <a:lstStyle/>
+          <a:p>
+            <a:pPr algn="ctr"/>
+            <a:r>
+              <a:rPr sz="1200" b="1">
+                <a:solidFill>
+                  <a:srgbClr val="38BDF8"/>
+                </a:solidFill>
+                <a:latin typeface="Calibri"/>
+              </a:rPr>
+              <a:t>Suggested actions:  </a:t>
+            </a:r>
+            <a:r>
+              <a:rPr sz="1200" b="0">
+                <a:solidFill>
+                  <a:srgbClr val="F3F4F6"/>
+                </a:solidFill>
+                <a:latin typeface="Calibri"/>
+              </a:rPr>
+              <a:t>Reward and retain the 249 already-converting Premium users; send the 351 Free users goal-based premium trial reminders rather than generic reactivation.</a:t>
+            </a:r>
+          </a:p>
+        </p:txBody>
+      </p:sp>
+      <p:sp>
+        <p:nvSpPr>
+          <p:cNvPr id="8" name="TextBox 7"/>
+          <p:cNvSpPr txBox="1"/>
+          <p:nvPr/>
+        </p:nvSpPr>
+        <p:spPr>
+          <a:xfrm>
+            <a:off x="6355080" y="1371600"/>
+            <a:ext cx="5212080" cy="365760"/>
+          </a:xfrm>
+          <a:prstGeom prst="rect">
+            <a:avLst/>
+          </a:prstGeom>
+          <a:noFill/>
+        </p:spPr>
+        <p:txBody>
+          <a:bodyPr wrap="square">
+            <a:spAutoFit/>
+          </a:bodyPr>
+          <a:lstStyle/>
+          <a:p>
+            <a:pPr algn="ctr"/>
+            <a:r>
+              <a:rPr sz="1400" b="1">
+                <a:solidFill>
+                  <a:srgbClr val="F3F4F6"/>
+                </a:solidFill>
+                <a:latin typeface="Calibri"/>
+              </a:rPr>
+              <a:t>User Segments: Purchase vs Completion Rate</a:t>
+            </a:r>
+          </a:p>
+        </p:txBody>
+      </p:sp>
+      <p:pic>
+        <p:nvPicPr>
+          <p:cNvPr id="9" name="Picture 8" descr="cluster_chart.png"/>
+          <p:cNvPicPr>
+            <a:picLocks noChangeAspect="1"/>
+          </p:cNvPicPr>
+          <p:nvPr/>
+        </p:nvPicPr>
+        <p:blipFill>
+          <a:blip r:embed="rId2"/>
+          <a:stretch>
+            <a:fillRect/>
+          </a:stretch>
+        </p:blipFill>
+        <p:spPr>
+          <a:xfrm>
+            <a:off x="6355080" y="1783080"/>
+            <a:ext cx="5212080" cy="2286000"/>
+          </a:xfrm>
+          <a:prstGeom prst="rect">
+            <a:avLst/>
+          </a:prstGeom>
+        </p:spPr>
+      </p:pic>
+      <p:sp>
+        <p:nvSpPr>
+          <p:cNvPr id="10" name="Rectangle 9"/>
+          <p:cNvSpPr/>
+          <p:nvPr/>
+        </p:nvSpPr>
+        <p:spPr>
+          <a:xfrm>
+            <a:off x="6355080" y="4206240"/>
+            <a:ext cx="5212080" cy="1371600"/>
+          </a:xfrm>
+          <a:prstGeom prst="rect">
+            <a:avLst/>
+          </a:prstGeom>
+          <a:solidFill>
+            <a:srgbClr val="0C1A2E"/>
+          </a:solidFill>
+          <a:ln w="12700">
+            <a:solidFill>
+              <a:srgbClr val="38BDF8"/>
+            </a:solidFill>
+          </a:ln>
+        </p:spPr>
+        <p:style>
+          <a:lnRef idx="1">
+            <a:schemeClr val="accent1"/>
+          </a:lnRef>
+          <a:fillRef idx="3">
+            <a:schemeClr val="accent1"/>
+          </a:fillRef>
+          <a:effectRef idx="2">
+            <a:schemeClr val="accent1"/>
+          </a:effectRef>
+          <a:fontRef idx="minor">
+            <a:schemeClr val="lt1"/>
+          </a:fontRef>
+        </p:style>
+        <p:txBody>
+          <a:bodyPr rtlCol="0" anchor="ctr" wrap="square" lIns="228600" tIns="137160" rIns="137160"/>
+          <a:lstStyle/>
+          <a:p>
+            <a:pPr algn="ctr"/>
+            <a:r>
+              <a:rPr sz="1200" b="1">
+                <a:solidFill>
+                  <a:srgbClr val="38BDF8"/>
+                </a:solidFill>
+                <a:latin typeface="Calibri"/>
+              </a:rPr>
+              <a:t>Insight:  </a:t>
+            </a:r>
+            <a:r>
+              <a:rPr sz="1200" b="0">
+                <a:solidFill>
+                  <a:srgbClr val="F3F4F6"/>
+                </a:solidFill>
+                <a:latin typeface="Calibri"/>
+              </a:rPr>
+              <a:t>This split tracks purchase behavior, not overall activity — it does not line up with the real Engagement_Level label, which is driven by workout frequency instead.</a:t>
+            </a:r>
+          </a:p>
+        </p:txBody>
+      </p:sp>
+      <p:sp>
+        <p:nvSpPr>
+          <p:cNvPr id="11" name="TextBox 10"/>
+          <p:cNvSpPr txBox="1"/>
+          <p:nvPr/>
+        </p:nvSpPr>
+        <p:spPr>
+          <a:xfrm>
+            <a:off x="548640" y="6473952"/>
+            <a:ext cx="5486400" cy="274320"/>
+          </a:xfrm>
+          <a:prstGeom prst="rect">
+            <a:avLst/>
+          </a:prstGeom>
+          <a:noFill/>
+        </p:spPr>
+        <p:txBody>
+          <a:bodyPr wrap="square">
+            <a:spAutoFit/>
+          </a:bodyPr>
+          <a:lstStyle/>
+          <a:p>
+            <a:pPr algn="l"/>
+            <a:r>
+              <a:rPr sz="900" b="0">
+                <a:solidFill>
+                  <a:srgbClr val="4B5568"/>
+                </a:solidFill>
+                <a:latin typeface="Calibri"/>
+              </a:rPr>
+              <a:t>FitTech App Analytics  |  14 / 17</a:t>
+            </a:r>
+          </a:p>
+        </p:txBody>
+      </p:sp>
+    </p:spTree>
+  </p:cSld>
+  <p:clrMapOvr>
+    <a:masterClrMapping/>
+  </p:clrMapOvr>
+</p:sld>
+</file>
+
+<file path=ppt/slides/slide15.xml><?xml version="1.0" encoding="utf-8"?>
 <p:sld xmlns:a="http://schemas.openxmlformats.org/drawingml/2006/main" xmlns:r="http://schemas.openxmlformats.org/officeDocument/2006/relationships" xmlns:p="http://schemas.openxmlformats.org/presentationml/2006/main">
   <p:cSld name="Slide 13">
     <p:bg>
@@ -7490,6 +8470,10 @@
             </a:outerShdw>
           </a:effectLst>
         </p:spPr>
+        <p:txBody>
+          <a:bodyPr/>
+          <a:p/>
+        </p:txBody>
       </p:sp>
       <p:sp>
         <p:nvSpPr>
@@ -7514,6 +8498,10 @@
           </a:solidFill>
           <a:ln/>
         </p:spPr>
+        <p:txBody>
+          <a:bodyPr/>
+          <a:p/>
+        </p:txBody>
       </p:sp>
       <p:sp>
         <p:nvSpPr>
@@ -7629,6 +8617,10 @@
             </a:outerShdw>
           </a:effectLst>
         </p:spPr>
+        <p:txBody>
+          <a:bodyPr/>
+          <a:p/>
+        </p:txBody>
       </p:sp>
       <p:sp>
         <p:nvSpPr>
@@ -7653,6 +8645,10 @@
           </a:solidFill>
           <a:ln/>
         </p:spPr>
+        <p:txBody>
+          <a:bodyPr/>
+          <a:p/>
+        </p:txBody>
       </p:sp>
       <p:sp>
         <p:nvSpPr>
@@ -7768,6 +8764,10 @@
             </a:outerShdw>
           </a:effectLst>
         </p:spPr>
+        <p:txBody>
+          <a:bodyPr/>
+          <a:p/>
+        </p:txBody>
       </p:sp>
       <p:sp>
         <p:nvSpPr>
@@ -7792,6 +8792,10 @@
           </a:solidFill>
           <a:ln/>
         </p:spPr>
+        <p:txBody>
+          <a:bodyPr/>
+          <a:p/>
+        </p:txBody>
       </p:sp>
       <p:sp>
         <p:nvSpPr>
@@ -7907,6 +8911,10 @@
             </a:outerShdw>
           </a:effectLst>
         </p:spPr>
+        <p:txBody>
+          <a:bodyPr/>
+          <a:p/>
+        </p:txBody>
       </p:sp>
       <p:sp>
         <p:nvSpPr>
@@ -7931,6 +8939,10 @@
           </a:solidFill>
           <a:ln/>
         </p:spPr>
+        <p:txBody>
+          <a:bodyPr/>
+          <a:p/>
+        </p:txBody>
       </p:sp>
       <p:sp>
         <p:nvSpPr>
@@ -8046,6 +9058,10 @@
             </a:outerShdw>
           </a:effectLst>
         </p:spPr>
+        <p:txBody>
+          <a:bodyPr/>
+          <a:p/>
+        </p:txBody>
       </p:sp>
       <p:sp>
         <p:nvSpPr>
@@ -8070,6 +9086,10 @@
           </a:solidFill>
           <a:ln/>
         </p:spPr>
+        <p:txBody>
+          <a:bodyPr/>
+          <a:p/>
+        </p:txBody>
       </p:sp>
       <p:sp>
         <p:nvSpPr>
@@ -8185,6 +9205,10 @@
             </a:outerShdw>
           </a:effectLst>
         </p:spPr>
+        <p:txBody>
+          <a:bodyPr/>
+          <a:p/>
+        </p:txBody>
       </p:sp>
       <p:sp>
         <p:nvSpPr>
@@ -8209,6 +9233,10 @@
           </a:solidFill>
           <a:ln/>
         </p:spPr>
+        <p:txBody>
+          <a:bodyPr/>
+          <a:p/>
+        </p:txBody>
       </p:sp>
       <p:sp>
         <p:nvSpPr>
@@ -8324,7 +9352,7 @@
                 <a:ea typeface="Calibri" pitchFamily="34" charset="-122"/>
                 <a:cs typeface="Calibri" pitchFamily="34" charset="-120"/>
               </a:rPr>
-              <a:t>FitTech App Analytics  |  13 / 15</a:t>
+              <a:t>FitTech App Analytics  |  15 / 17</a:t>
             </a:r>
             <a:endParaRPr lang="en-US" sz="900" dirty="0"/>
           </a:p>
@@ -8338,7 +9366,7 @@
 </p:sld>
 </file>
 
-<file path=ppt/slides/slide14.xml><?xml version="1.0" encoding="utf-8"?>
+<file path=ppt/slides/slide16.xml><?xml version="1.0" encoding="utf-8"?>
 <p:sld xmlns:a="http://schemas.openxmlformats.org/drawingml/2006/main" xmlns:r="http://schemas.openxmlformats.org/officeDocument/2006/relationships" xmlns:p="http://schemas.openxmlformats.org/presentationml/2006/main">
   <p:cSld name="Slide 14">
     <p:bg>
@@ -8473,6 +9501,10 @@
             </a:outerShdw>
           </a:effectLst>
         </p:spPr>
+        <p:txBody>
+          <a:bodyPr/>
+          <a:p/>
+        </p:txBody>
       </p:sp>
       <p:sp>
         <p:nvSpPr>
@@ -8630,6 +9662,10 @@
             </a:outerShdw>
           </a:effectLst>
         </p:spPr>
+        <p:txBody>
+          <a:bodyPr/>
+          <a:p/>
+        </p:txBody>
       </p:sp>
       <p:sp>
         <p:nvSpPr>
@@ -8787,6 +9823,10 @@
             </a:outerShdw>
           </a:effectLst>
         </p:spPr>
+        <p:txBody>
+          <a:bodyPr/>
+          <a:p/>
+        </p:txBody>
       </p:sp>
       <p:sp>
         <p:nvSpPr>
@@ -8944,6 +9984,10 @@
             </a:outerShdw>
           </a:effectLst>
         </p:spPr>
+        <p:txBody>
+          <a:bodyPr/>
+          <a:p/>
+        </p:txBody>
       </p:sp>
       <p:sp>
         <p:nvSpPr>
@@ -9098,6 +10142,10 @@
             </a:outerShdw>
           </a:effectLst>
         </p:spPr>
+        <p:txBody>
+          <a:bodyPr/>
+          <a:p/>
+        </p:txBody>
       </p:sp>
       <p:sp>
         <p:nvSpPr>
@@ -9213,7 +10261,7 @@
                 <a:ea typeface="Calibri" pitchFamily="34" charset="-122"/>
                 <a:cs typeface="Calibri" pitchFamily="34" charset="-120"/>
               </a:rPr>
-              <a:t>FitTech App Analytics  |  14 / 15</a:t>
+              <a:t>FitTech App Analytics  |  16 / 17</a:t>
             </a:r>
             <a:endParaRPr lang="en-US" sz="900" dirty="0"/>
           </a:p>
@@ -9227,7 +10275,7 @@
 </p:sld>
 </file>
 
-<file path=ppt/slides/slide15.xml><?xml version="1.0" encoding="utf-8"?>
+<file path=ppt/slides/slide17.xml><?xml version="1.0" encoding="utf-8"?>
 <p:sld xmlns:a="http://schemas.openxmlformats.org/drawingml/2006/main" xmlns:r="http://schemas.openxmlformats.org/officeDocument/2006/relationships" xmlns:p="http://schemas.openxmlformats.org/presentationml/2006/main">
   <p:cSld name="Slide 15">
     <p:bg>
@@ -9272,6 +10320,10 @@
           </a:solidFill>
           <a:ln/>
         </p:spPr>
+        <p:txBody>
+          <a:bodyPr/>
+          <a:p/>
+        </p:txBody>
       </p:sp>
       <p:sp>
         <p:nvSpPr>
@@ -9639,6 +10691,10 @@
             </a:outerShdw>
           </a:effectLst>
         </p:spPr>
+        <p:txBody>
+          <a:bodyPr/>
+          <a:p/>
+        </p:txBody>
       </p:sp>
       <p:sp>
         <p:nvSpPr>
@@ -9790,6 +10846,10 @@
             </a:outerShdw>
           </a:effectLst>
         </p:spPr>
+        <p:txBody>
+          <a:bodyPr/>
+          <a:p/>
+        </p:txBody>
       </p:sp>
       <p:sp>
         <p:nvSpPr>
@@ -9941,6 +11001,10 @@
             </a:outerShdw>
           </a:effectLst>
         </p:spPr>
+        <p:txBody>
+          <a:bodyPr/>
+          <a:p/>
+        </p:txBody>
       </p:sp>
       <p:sp>
         <p:nvSpPr>
@@ -10092,6 +11156,10 @@
             </a:outerShdw>
           </a:effectLst>
         </p:spPr>
+        <p:txBody>
+          <a:bodyPr/>
+          <a:p/>
+        </p:txBody>
       </p:sp>
       <p:sp>
         <p:nvSpPr>
@@ -10243,6 +11311,10 @@
             </a:outerShdw>
           </a:effectLst>
         </p:spPr>
+        <p:txBody>
+          <a:bodyPr/>
+          <a:p/>
+        </p:txBody>
       </p:sp>
       <p:sp>
         <p:nvSpPr>
@@ -10336,7 +11408,7 @@
                 <a:ea typeface="Calibri" pitchFamily="34" charset="-122"/>
                 <a:cs typeface="Calibri" pitchFamily="34" charset="-120"/>
               </a:rPr>
-              <a:t>FitTech App Analytics  |  2 / 15</a:t>
+              <a:t>FitTech App Analytics  |  2 / 17</a:t>
             </a:r>
             <a:endParaRPr lang="en-US" sz="900" dirty="0"/>
           </a:p>
@@ -10485,6 +11557,10 @@
             </a:outerShdw>
           </a:effectLst>
         </p:spPr>
+        <p:txBody>
+          <a:bodyPr/>
+          <a:p/>
+        </p:txBody>
       </p:sp>
       <p:sp>
         <p:nvSpPr>
@@ -10507,6 +11583,10 @@
           </a:solidFill>
           <a:ln/>
         </p:spPr>
+        <p:txBody>
+          <a:bodyPr/>
+          <a:p/>
+        </p:txBody>
       </p:sp>
       <p:sp>
         <p:nvSpPr>
@@ -10653,6 +11733,10 @@
             <a:prstDash val="solid"/>
           </a:ln>
         </p:spPr>
+        <p:txBody>
+          <a:bodyPr/>
+          <a:p/>
+        </p:txBody>
       </p:sp>
       <p:sp>
         <p:nvSpPr>
@@ -10746,6 +11830,10 @@
             </a:outerShdw>
           </a:effectLst>
         </p:spPr>
+        <p:txBody>
+          <a:bodyPr/>
+          <a:p/>
+        </p:txBody>
       </p:sp>
       <p:sp>
         <p:nvSpPr>
@@ -10768,6 +11856,10 @@
           </a:solidFill>
           <a:ln/>
         </p:spPr>
+        <p:txBody>
+          <a:bodyPr/>
+          <a:p/>
+        </p:txBody>
       </p:sp>
       <p:sp>
         <p:nvSpPr>
@@ -10914,6 +12006,10 @@
             <a:prstDash val="solid"/>
           </a:ln>
         </p:spPr>
+        <p:txBody>
+          <a:bodyPr/>
+          <a:p/>
+        </p:txBody>
       </p:sp>
       <p:sp>
         <p:nvSpPr>
@@ -11007,6 +12103,10 @@
             </a:outerShdw>
           </a:effectLst>
         </p:spPr>
+        <p:txBody>
+          <a:bodyPr/>
+          <a:p/>
+        </p:txBody>
       </p:sp>
       <p:sp>
         <p:nvSpPr>
@@ -11029,6 +12129,10 @@
           </a:solidFill>
           <a:ln/>
         </p:spPr>
+        <p:txBody>
+          <a:bodyPr/>
+          <a:p/>
+        </p:txBody>
       </p:sp>
       <p:sp>
         <p:nvSpPr>
@@ -11175,6 +12279,10 @@
             <a:prstDash val="solid"/>
           </a:ln>
         </p:spPr>
+        <p:txBody>
+          <a:bodyPr/>
+          <a:p/>
+        </p:txBody>
       </p:sp>
       <p:sp>
         <p:nvSpPr>
@@ -11268,6 +12376,10 @@
             </a:outerShdw>
           </a:effectLst>
         </p:spPr>
+        <p:txBody>
+          <a:bodyPr/>
+          <a:p/>
+        </p:txBody>
       </p:sp>
       <p:sp>
         <p:nvSpPr>
@@ -11290,6 +12402,10 @@
           </a:solidFill>
           <a:ln/>
         </p:spPr>
+        <p:txBody>
+          <a:bodyPr/>
+          <a:p/>
+        </p:txBody>
       </p:sp>
       <p:sp>
         <p:nvSpPr>
@@ -11436,6 +12552,10 @@
             <a:prstDash val="solid"/>
           </a:ln>
         </p:spPr>
+        <p:txBody>
+          <a:bodyPr/>
+          <a:p/>
+        </p:txBody>
       </p:sp>
       <p:sp>
         <p:nvSpPr>
@@ -11529,7 +12649,7 @@
                 <a:ea typeface="Calibri" pitchFamily="34" charset="-122"/>
                 <a:cs typeface="Calibri" pitchFamily="34" charset="-120"/>
               </a:rPr>
-              <a:t>FitTech App Analytics  |  3 / 15</a:t>
+              <a:t>FitTech App Analytics  |  3 / 17</a:t>
             </a:r>
             <a:endParaRPr lang="en-US" sz="900" dirty="0"/>
           </a:p>
@@ -11817,6 +12937,10 @@
             </a:outerShdw>
           </a:effectLst>
         </p:spPr>
+        <p:txBody>
+          <a:bodyPr/>
+          <a:p/>
+        </p:txBody>
       </p:sp>
       <p:sp>
         <p:nvSpPr>
@@ -11910,7 +13034,7 @@
                 <a:ea typeface="Calibri" pitchFamily="34" charset="-122"/>
                 <a:cs typeface="Calibri" pitchFamily="34" charset="-120"/>
               </a:rPr>
-              <a:t>FitTech App Analytics  |  4 / 15</a:t>
+              <a:t>FitTech App Analytics  |  4 / 17</a:t>
             </a:r>
             <a:endParaRPr lang="en-US" sz="900" dirty="0"/>
           </a:p>
@@ -12114,6 +13238,10 @@
             </a:outerShdw>
           </a:effectLst>
         </p:spPr>
+        <p:txBody>
+          <a:bodyPr/>
+          <a:p/>
+        </p:txBody>
       </p:sp>
       <p:sp>
         <p:nvSpPr>
@@ -12246,6 +13374,10 @@
             </a:outerShdw>
           </a:effectLst>
         </p:spPr>
+        <p:txBody>
+          <a:bodyPr/>
+          <a:p/>
+        </p:txBody>
       </p:sp>
       <p:sp>
         <p:nvSpPr>
@@ -12346,6 +13478,10 @@
           </a:solidFill>
           <a:ln/>
         </p:spPr>
+        <p:txBody>
+          <a:bodyPr/>
+          <a:p/>
+        </p:txBody>
       </p:sp>
       <p:sp>
         <p:nvSpPr>
@@ -12446,6 +13582,10 @@
           </a:solidFill>
           <a:ln/>
         </p:spPr>
+        <p:txBody>
+          <a:bodyPr/>
+          <a:p/>
+        </p:txBody>
       </p:sp>
       <p:sp>
         <p:nvSpPr>
@@ -12546,6 +13686,10 @@
           </a:solidFill>
           <a:ln/>
         </p:spPr>
+        <p:txBody>
+          <a:bodyPr/>
+          <a:p/>
+        </p:txBody>
       </p:sp>
       <p:sp>
         <p:nvSpPr>
@@ -12646,6 +13790,10 @@
           </a:solidFill>
           <a:ln/>
         </p:spPr>
+        <p:txBody>
+          <a:bodyPr/>
+          <a:p/>
+        </p:txBody>
       </p:sp>
       <p:sp>
         <p:nvSpPr>
@@ -12719,6 +13867,10 @@
             </a:outerShdw>
           </a:effectLst>
         </p:spPr>
+        <p:txBody>
+          <a:bodyPr/>
+          <a:p/>
+        </p:txBody>
       </p:sp>
       <p:sp>
         <p:nvSpPr>
@@ -12812,7 +13964,7 @@
                 <a:ea typeface="Calibri" pitchFamily="34" charset="-122"/>
                 <a:cs typeface="Calibri" pitchFamily="34" charset="-120"/>
               </a:rPr>
-              <a:t>FitTech App Analytics  |  5 / 15</a:t>
+              <a:t>FitTech App Analytics  |  5 / 17</a:t>
             </a:r>
             <a:endParaRPr lang="en-US" sz="900" dirty="0"/>
           </a:p>
@@ -13016,6 +14168,10 @@
             </a:outerShdw>
           </a:effectLst>
         </p:spPr>
+        <p:txBody>
+          <a:bodyPr/>
+          <a:p/>
+        </p:txBody>
       </p:sp>
       <p:sp>
         <p:nvSpPr>
@@ -13164,6 +14320,10 @@
             </a:outerShdw>
           </a:effectLst>
         </p:spPr>
+        <p:txBody>
+          <a:bodyPr/>
+          <a:p/>
+        </p:txBody>
       </p:sp>
       <p:sp>
         <p:nvSpPr>
@@ -13257,7 +14417,7 @@
                 <a:ea typeface="Calibri" pitchFamily="34" charset="-122"/>
                 <a:cs typeface="Calibri" pitchFamily="34" charset="-120"/>
               </a:rPr>
-              <a:t>FitTech App Analytics  |  6 / 15</a:t>
+              <a:t>FitTech App Analytics  |  6 / 17</a:t>
             </a:r>
             <a:endParaRPr lang="en-US" sz="900" dirty="0"/>
           </a:p>
@@ -13461,6 +14621,10 @@
             </a:outerShdw>
           </a:effectLst>
         </p:spPr>
+        <p:txBody>
+          <a:bodyPr/>
+          <a:p/>
+        </p:txBody>
       </p:sp>
       <p:sp>
         <p:nvSpPr>
@@ -13609,6 +14773,10 @@
             </a:outerShdw>
           </a:effectLst>
         </p:spPr>
+        <p:txBody>
+          <a:bodyPr/>
+          <a:p/>
+        </p:txBody>
       </p:sp>
       <p:sp>
         <p:nvSpPr>
@@ -13702,7 +14870,7 @@
                 <a:ea typeface="Calibri" pitchFamily="34" charset="-122"/>
                 <a:cs typeface="Calibri" pitchFamily="34" charset="-120"/>
               </a:rPr>
-              <a:t>FitTech App Analytics  |  7 / 15</a:t>
+              <a:t>FitTech App Analytics  |  7 / 17</a:t>
             </a:r>
             <a:endParaRPr lang="en-US" sz="900" dirty="0"/>
           </a:p>
@@ -13851,6 +15019,10 @@
             </a:outerShdw>
           </a:effectLst>
         </p:spPr>
+        <p:txBody>
+          <a:bodyPr/>
+          <a:p/>
+        </p:txBody>
       </p:sp>
       <p:sp>
         <p:nvSpPr>
@@ -13875,6 +15047,10 @@
           </a:solidFill>
           <a:ln/>
         </p:spPr>
+        <p:txBody>
+          <a:bodyPr/>
+          <a:p/>
+        </p:txBody>
       </p:sp>
       <p:sp>
         <p:nvSpPr>
@@ -14022,6 +15198,10 @@
           </a:solidFill>
           <a:ln/>
         </p:spPr>
+        <p:txBody>
+          <a:bodyPr/>
+          <a:p/>
+        </p:txBody>
       </p:sp>
       <p:sp>
         <p:nvSpPr>
@@ -14176,6 +15356,10 @@
             </a:outerShdw>
           </a:effectLst>
         </p:spPr>
+        <p:txBody>
+          <a:bodyPr/>
+          <a:p/>
+        </p:txBody>
       </p:sp>
       <p:sp>
         <p:nvSpPr>
@@ -14200,6 +15384,10 @@
           </a:solidFill>
           <a:ln/>
         </p:spPr>
+        <p:txBody>
+          <a:bodyPr/>
+          <a:p/>
+        </p:txBody>
       </p:sp>
       <p:sp>
         <p:nvSpPr>
@@ -14347,6 +15535,10 @@
           </a:solidFill>
           <a:ln/>
         </p:spPr>
+        <p:txBody>
+          <a:bodyPr/>
+          <a:p/>
+        </p:txBody>
       </p:sp>
       <p:sp>
         <p:nvSpPr>
@@ -14501,6 +15693,10 @@
             </a:outerShdw>
           </a:effectLst>
         </p:spPr>
+        <p:txBody>
+          <a:bodyPr/>
+          <a:p/>
+        </p:txBody>
       </p:sp>
       <p:sp>
         <p:nvSpPr>
@@ -14525,6 +15721,10 @@
           </a:solidFill>
           <a:ln/>
         </p:spPr>
+        <p:txBody>
+          <a:bodyPr/>
+          <a:p/>
+        </p:txBody>
       </p:sp>
       <p:sp>
         <p:nvSpPr>
@@ -14672,6 +15872,10 @@
           </a:solidFill>
           <a:ln/>
         </p:spPr>
+        <p:txBody>
+          <a:bodyPr/>
+          <a:p/>
+        </p:txBody>
       </p:sp>
       <p:sp>
         <p:nvSpPr>
@@ -14706,7 +15910,7 @@
                 <a:ea typeface="Calibri" pitchFamily="34" charset="-122"/>
                 <a:cs typeface="Calibri" pitchFamily="34" charset="-120"/>
               </a:rPr>
-              <a:t>T = 1.22 (17.84 vs 17.82 min)</a:t>
+              <a:t>T = 1.22 (17.84 vs 17.82 min), n = 73,024 vs 126,976</a:t>
             </a:r>
             <a:endParaRPr lang="en-US" sz="1300" dirty="0"/>
           </a:p>
@@ -14826,7 +16030,7 @@
                 <a:ea typeface="Calibri" pitchFamily="34" charset="-122"/>
                 <a:cs typeface="Calibri" pitchFamily="34" charset="-120"/>
               </a:rPr>
-              <a:t>FitTech App Analytics  |  8 / 15</a:t>
+              <a:t>FitTech App Analytics  |  8 / 17</a:t>
             </a:r>
             <a:endParaRPr lang="en-US" sz="900" dirty="0"/>
           </a:p>
@@ -15014,6 +16218,10 @@
             </a:outerShdw>
           </a:effectLst>
         </p:spPr>
+        <p:txBody>
+          <a:bodyPr/>
+          <a:p/>
+        </p:txBody>
       </p:sp>
       <p:sp>
         <p:nvSpPr>
@@ -15221,6 +16429,10 @@
             </a:outerShdw>
           </a:effectLst>
         </p:spPr>
+        <p:txBody>
+          <a:bodyPr/>
+          <a:p/>
+        </p:txBody>
       </p:sp>
       <p:sp>
         <p:nvSpPr>
@@ -15428,6 +16640,10 @@
             </a:outerShdw>
           </a:effectLst>
         </p:spPr>
+        <p:txBody>
+          <a:bodyPr/>
+          <a:p/>
+        </p:txBody>
       </p:sp>
       <p:sp>
         <p:nvSpPr>
@@ -15635,6 +16851,10 @@
             </a:outerShdw>
           </a:effectLst>
         </p:spPr>
+        <p:txBody>
+          <a:bodyPr/>
+          <a:p/>
+        </p:txBody>
       </p:sp>
       <p:sp>
         <p:nvSpPr>
@@ -15842,6 +17062,10 @@
             </a:outerShdw>
           </a:effectLst>
         </p:spPr>
+        <p:txBody>
+          <a:bodyPr/>
+          <a:p/>
+        </p:txBody>
       </p:sp>
       <p:sp>
         <p:nvSpPr>
@@ -15929,7 +17153,7 @@
                 <a:ea typeface="Calibri" pitchFamily="34" charset="-122"/>
                 <a:cs typeface="Calibri" pitchFamily="34" charset="-120"/>
               </a:rPr>
-              <a:t>FitTech App Analytics  |  9 / 15</a:t>
+              <a:t>FitTech App Analytics  |  9 / 17</a:t>
             </a:r>
             <a:endParaRPr lang="en-US" sz="900" dirty="0"/>
           </a:p>
